--- a/deliverables/video-2-slides/out/Video-2-Is-Your-Job-Making-You-Less-Marketable_v1.1.pptx
+++ b/deliverables/video-2-slides/out/Video-2-Is-Your-Job-Making-You-Less-Marketable_v1.1.pptx
@@ -514,81 +514,27 @@
           <a:lstStyle/>
           <a:p>
             <a:r>
-              <a:t>Timing: 0:00-0:45</a:t>
-            </a:r>
-          </a:p>
-          <a:p/>
-          <a:p>
-            <a:r>
-              <a:t>Begin full-screen on Temidayo, not on this slide.</a:t>
-            </a:r>
-          </a:p>
-          <a:p/>
-          <a:p>
-            <a:r>
-              <a:t>Exact opening:</a:t>
-            </a:r>
-          </a:p>
-          <a:p/>
-          <a:p>
-            <a:r>
-              <a:t>"A job can make you more valuable inside one company while making you harder</a:t>
-            </a:r>
-          </a:p>
-          <a:p>
-            <a:r>
-              <a:t>to understand everywhere else. That can happen while you are being praised,</a:t>
-            </a:r>
-          </a:p>
-          <a:p>
-            <a:r>
-              <a:t>well paid, and the person everyone depends on. In this video, I am going to</a:t>
-            </a:r>
-          </a:p>
-          <a:p>
-            <a:r>
-              <a:t>give you three tests for whether your current success is expanding your</a:t>
-            </a:r>
-          </a:p>
-          <a:p>
-            <a:r>
-              <a:t>marketability or quietly narrowing it. By the end, you will know what to strip</a:t>
-            </a:r>
-          </a:p>
-          <a:p>
-            <a:r>
-              <a:t>away from the way you describe your work, what outside-context evidence to</a:t>
-            </a:r>
-          </a:p>
-          <a:p>
-            <a:r>
-              <a:t>look for, and what the last 90 days have actually added to your judgment. I am</a:t>
-            </a:r>
-          </a:p>
-          <a:p>
-            <a:r>
-              <a:t>Temidayo Afonja. On this channel, I help experienced professionals make</a:t>
-            </a:r>
-          </a:p>
-          <a:p>
-            <a:r>
-              <a:t>clearer career decisions by looking at what their work is actually building in</a:t>
-            </a:r>
-          </a:p>
-          <a:p>
-            <a:r>
-              <a:t>them."</a:t>
-            </a:r>
-          </a:p>
-          <a:p/>
-          <a:p>
-            <a:r>
-              <a:t>Move to the title only after the three-test promise and the channel line are</a:t>
-            </a:r>
-          </a:p>
-          <a:p>
-            <a:r>
-              <a:t>clear. Do not make the opening alarmist.</a:t>
+              <a:t>Timing: approximately 0:38 to 0:57.</a:t>
+            </a:r>
+          </a:p>
+          <a:p>
+            <a:r>
+              <a:t>Do NOT open on this slide. Begin full-screen on Temidayo and let the whole H.I.T. opening land first: the hook, the viewer bridge, her own cross-industry proof, the valuable-here / legible-elsewhere line and the three-test promise.</a:t>
+            </a:r>
+          </a:p>
+          <a:p>
+            <a:r>
+              <a:t>Bring the title up under the channel line: "I'm Temidayo Afonja. I help experienced professionals understand what their work has built, what can travel, and what still has to be learned when the context changes. And that is what I want to help you do here."</a:t>
+            </a:r>
+          </a:p>
+          <a:p>
+            <a:r>
+              <a:t>That second sentence is the turn from positioning to relationship. Stay on her face for it.</a:t>
+            </a:r>
+          </a:p>
+          <a:p>
+            <a:r>
+              <a:t>Do not make the opening alarmist.</a:t>
             </a:r>
           </a:p>
         </p:txBody>
@@ -658,55 +604,22 @@
           <a:lstStyle/>
           <a:p>
             <a:r>
-              <a:t>Timing: 6:25-7:10</a:t>
-            </a:r>
-          </a:p>
-          <a:p/>
-          <a:p>
-            <a:r>
-              <a:t>Keep this quiet and provisional. Do not turn the four patterns into a dramatic</a:t>
-            </a:r>
-          </a:p>
-          <a:p>
-            <a:r>
-              <a:t>diagnosis of the viewer.</a:t>
-            </a:r>
-          </a:p>
-          <a:p/>
-          <a:p>
-            <a:r>
-              <a:t>Spoken, not on the slide: if judgment is deepening and the capability is</a:t>
-            </a:r>
-          </a:p>
-          <a:p>
-            <a:r>
-              <a:t>useful across contexts, the work is compounding. If expertise is deepening but</a:t>
-            </a:r>
-          </a:p>
-          <a:p>
-            <a:r>
-              <a:t>its usefulness is trapped inside one environment, that can be a Depth Trap. If</a:t>
-            </a:r>
-          </a:p>
-          <a:p>
-            <a:r>
-              <a:t>visibility is growing but the work is not building depth, the position may be</a:t>
-            </a:r>
-          </a:p>
-          <a:p>
-            <a:r>
-              <a:t>fragile. If neither the capability nor the options are growing, the role may</a:t>
-            </a:r>
-          </a:p>
-          <a:p>
-            <a:r>
-              <a:t>be stagnant even while performance stays strong.</a:t>
-            </a:r>
-          </a:p>
-          <a:p/>
-          <a:p>
-            <a:r>
-              <a:t>Do not diagnose from one familiar sign.</a:t>
+              <a:t>Timing: approximately 5:58.</a:t>
+            </a:r>
+          </a:p>
+          <a:p>
+            <a:r>
+              <a:t>Hold the two questions side by side while Temidayo walks the four readings.</a:t>
+            </a:r>
+          </a:p>
+          <a:p>
+            <a:r>
+              <a:t>The governing line is hers and it is addressed to the viewer: "I am not asking you to diagnose yourself from one quarter or one frustrating assignment. What matters is the pattern."</a:t>
+            </a:r>
+          </a:p>
+          <a:p>
+            <a:r>
+              <a:t>No diagnostic tone. No scorecard treatment.</a:t>
             </a:r>
           </a:p>
         </p:txBody>
@@ -776,35 +689,27 @@
           <a:lstStyle/>
           <a:p>
             <a:r>
-              <a:t>Timing: 7:10-8:00</a:t>
-            </a:r>
-          </a:p>
-          <a:p/>
-          <a:p>
-            <a:r>
-              <a:t>Speak from ideas. Reveal one option at a time.</a:t>
-            </a:r>
-          </a:p>
-          <a:p/>
-          <a:p>
-            <a:r>
-              <a:t>Viewer action: choose one thing you can test during the next thirty days.</a:t>
-            </a:r>
-          </a:p>
-          <a:p>
-            <a:r>
-              <a:t>Sometimes the first move is to change the work before changing the employer.</a:t>
-            </a:r>
-          </a:p>
-          <a:p/>
-          <a:p>
-            <a:r>
-              <a:t>Gem to land: "Before you change the employer, test whether you can change what</a:t>
-            </a:r>
-          </a:p>
-          <a:p>
-            <a:r>
-              <a:t>the work is building."</a:t>
+              <a:t>Timing: approximately 6:50.</a:t>
+            </a:r>
+          </a:p>
+          <a:p>
+            <a:r>
+              <a:t>Progressive reveal, one option at a time.</a:t>
+            </a:r>
+          </a:p>
+          <a:p>
+            <a:r>
+              <a:t>This is the section that keeps the video non-alarmist, so give it room. A concern in one test does not mean resign.</a:t>
+            </a:r>
+          </a:p>
+          <a:p>
+            <a:r>
+              <a:t>The documentation option keeps its boundary verbatim: in the viewer's own words, at a permitted high level, without taking confidential or employer-owned material. Do not trim that qualifier.</a:t>
+            </a:r>
+          </a:p>
+          <a:p>
+            <a:r>
+              <a:t>Close on "Before you change the employer, test whether you can change what the work is building in you." </a:t>
             </a:r>
           </a:p>
         </p:txBody>
@@ -874,61 +779,27 @@
           <a:lstStyle/>
           <a:p>
             <a:r>
-              <a:t>Timing: 8:00-8:30</a:t>
-            </a:r>
-          </a:p>
-          <a:p/>
-          <a:p>
-            <a:r>
-              <a:t>Exact invitation:</a:t>
-            </a:r>
-          </a:p>
-          <a:p/>
-          <a:p>
-            <a:r>
-              <a:t>"If these three tests show that you need a fuller read of what your current</a:t>
-            </a:r>
-          </a:p>
-          <a:p>
-            <a:r>
-              <a:t>work is building and how portable it is, the Capability Formation Field Kit</a:t>
-            </a:r>
-          </a:p>
-          <a:p>
-            <a:r>
-              <a:t>gives you a private, evidence-led assessment using the last 90 days of your</a:t>
-            </a:r>
-          </a:p>
-          <a:p>
-            <a:r>
-              <a:t>actual work. It helps you read the position before you decide what comes next.</a:t>
-            </a:r>
-          </a:p>
-          <a:p>
-            <a:r>
-              <a:t>You can find it at temidayoafonja.com/fieldkit."</a:t>
-            </a:r>
-          </a:p>
-          <a:p/>
-          <a:p>
-            <a:r>
-              <a:t>Calm and brief. This is the only purchase invitation in the video. Show the</a:t>
-            </a:r>
-          </a:p>
-          <a:p>
-            <a:r>
-              <a:t>real Field Kit artwork briefly.</a:t>
-            </a:r>
-          </a:p>
-          <a:p/>
-          <a:p>
-            <a:r>
-              <a:t>Before publishing, verify the live /fieldkit redirect and the current Gumroad</a:t>
-            </a:r>
-          </a:p>
-          <a:p>
-            <a:r>
-              <a:t>listing.</a:t>
+              <a:t>Timing: approximately 7:49.</a:t>
+            </a:r>
+          </a:p>
+          <a:p>
+            <a:r>
+              <a:t>Exact invitation, verbatim from the v3.0 script:</a:t>
+            </a:r>
+          </a:p>
+          <a:p>
+            <a:r>
+              <a:t>"If these three tests tell you that you need a fuller read of what your current work is building and how portable it is, the Capability Formation Field Kit gives you a private, evidence-led assessment using the last 90 days of your actual work. It helps you see what is growing, what may be stalling, what looks portable and what you still need to investigate before you decide what comes next. You can find it at temidayoafonja.com/fieldkit."</a:t>
+            </a:r>
+          </a:p>
+          <a:p>
+            <a:r>
+              <a:t>Calm and brief. This is the only resource invitation in the video. Show the real Field Kit artwork briefly. Do not add Keep the Proof or the Career Evidence Starter.</a:t>
+            </a:r>
+          </a:p>
+          <a:p>
+            <a:r>
+              <a:t>Before publishing, verify the live /fieldkit redirect and the current listing.</a:t>
             </a:r>
           </a:p>
         </p:txBody>
@@ -998,46 +869,32 @@
           <a:lstStyle/>
           <a:p>
             <a:r>
-              <a:t>Timing: 8:30-9:00</a:t>
-            </a:r>
-          </a:p>
-          <a:p/>
-          <a:p>
-            <a:r>
-              <a:t>Exact bridge:</a:t>
-            </a:r>
-          </a:p>
-          <a:p/>
-          <a:p>
-            <a:r>
-              <a:t>"Before you decide that a concern means you should resign, there are three</a:t>
-            </a:r>
-          </a:p>
-          <a:p>
-            <a:r>
-              <a:t>things I want you to check. That is the next video: Before You Quit Your Job,</a:t>
-            </a:r>
-          </a:p>
-          <a:p>
-            <a:r>
-              <a:t>Check These 3 Things. Watch that one next."</a:t>
-            </a:r>
-          </a:p>
-          <a:p/>
+              <a:t>Timing: approximately 8:21 to the end, about 8:40.</a:t>
+            </a:r>
+          </a:p>
+          <a:p>
+            <a:r>
+              <a:t>Exact bridge, verbatim from the v3.0 script:</a:t>
+            </a:r>
+          </a:p>
+          <a:p>
+            <a:r>
+              <a:t>"And if what you are seeing has you seriously considering an exit, do not move straight from concern to resignation. There are three things I want you to check first. That is the next video: 3 Things to Do Before Quitting Your Job. Watch that one next."</a:t>
+            </a:r>
+          </a:p>
+          <a:p>
+            <a:r>
+              <a:t>DECK DEFECT — NOT FIXED. This card still reads "Before You Quit Your Job, Check These 3 Things", which is the RETIRED Video 3 title. The locked title is "3 Things to Do Before Quitting Your Job", which is what Temidayo says. No slide XML change was authorised in this pass. Until the card is corrected, do not hold it on screen while she names the video: stay on Temidayo, or cut to the end-screen route.</a:t>
+            </a:r>
+          </a:p>
           <a:p>
             <a:r>
               <a:t>Do not summarize this video again.</a:t>
             </a:r>
           </a:p>
-          <a:p/>
-          <a:p>
-            <a:r>
-              <a:t>The right side of the frame is left open for the YouTube linked-video</a:t>
-            </a:r>
-          </a:p>
-          <a:p>
-            <a:r>
-              <a:t>end-screen element. Hold the final frame for at least 12 seconds.</a:t>
+          <a:p>
+            <a:r>
+              <a:t>The right side of the frame is left open for the YouTube linked-video end-screen element. Hold the final frame for at least 12 seconds.</a:t>
             </a:r>
           </a:p>
         </p:txBody>
@@ -1107,67 +964,27 @@
           <a:lstStyle/>
           <a:p>
             <a:r>
-              <a:t>Timing: 0:45-1:55</a:t>
-            </a:r>
-          </a:p>
-          <a:p/>
-          <a:p>
-            <a:r>
-              <a:t>Speak from ideas. Keep this mostly on camera; the slide is visual tension,</a:t>
-            </a:r>
-          </a:p>
-          <a:p>
-            <a:r>
-              <a:t>not a lecture frame.</a:t>
-            </a:r>
-          </a:p>
-          <a:p/>
-          <a:p>
-            <a:r>
-              <a:t>Beats: praise can rise while the work becomes more context-bound; pay and</a:t>
-            </a:r>
-          </a:p>
-          <a:p>
-            <a:r>
-              <a:t>responsibility can rise because you know one environment extremely well;</a:t>
-            </a:r>
-          </a:p>
-          <a:p>
-            <a:r>
-              <a:t>dependence can come from undocumented knowledge, internal relationships or a</a:t>
-            </a:r>
-          </a:p>
-          <a:p>
-            <a:r>
-              <a:t>fragile process. None of that is a reason to panic or leave.</a:t>
-            </a:r>
-          </a:p>
-          <a:p/>
-          <a:p>
-            <a:r>
-              <a:t>Name the second question out loud, since the slide now points at it: whether</a:t>
-            </a:r>
-          </a:p>
-          <a:p>
-            <a:r>
-              <a:t>another context can recognize and use what you have built.</a:t>
-            </a:r>
-          </a:p>
-          <a:p/>
-          <a:p>
-            <a:r>
-              <a:t>Exact landing line:</a:t>
-            </a:r>
-          </a:p>
-          <a:p/>
-          <a:p>
-            <a:r>
-              <a:t>"Praise can tell you that you matter here. It cannot tell you how easily your</a:t>
-            </a:r>
-          </a:p>
-          <a:p>
-            <a:r>
-              <a:t>value travels."</a:t>
+              <a:t>Timing: approximately 0:57.</a:t>
+            </a:r>
+          </a:p>
+          <a:p>
+            <a:r>
+              <a:t>This is the central idea of the video. Let it sit.</a:t>
+            </a:r>
+          </a:p>
+          <a:p>
+            <a:r>
+              <a:t>Reveal the second question after the first has been asked, not before.</a:t>
+            </a:r>
+          </a:p>
+          <a:p>
+            <a:r>
+              <a:t>Temidayo is careful here and the edit must not undercut her: being relied on is real value, and none of this implies the viewer should leave. The closing beat of this section is "Praise tells you that you matter here. It cannot tell you how easily what you do travels."</a:t>
+            </a:r>
+          </a:p>
+          <a:p>
+            <a:r>
+              <a:t>Non-alarmist. No warning graphics, no red, no urgency motifs.</a:t>
             </a:r>
           </a:p>
         </p:txBody>
@@ -1237,35 +1054,12 @@
           <a:lstStyle/>
           <a:p>
             <a:r>
-              <a:t>Timing: 1:55-2:03</a:t>
-            </a:r>
-          </a:p>
-          <a:p/>
-          <a:p>
-            <a:r>
-              <a:t>A section break, four to seven seconds. Say: "The first test is to remove the</a:t>
-            </a:r>
-          </a:p>
-          <a:p>
-            <a:r>
-              <a:t>company nouns."</a:t>
-            </a:r>
-          </a:p>
-          <a:p/>
-          <a:p>
-            <a:r>
-              <a:t>Do not teach it here. The example slide follows.</a:t>
-            </a:r>
-          </a:p>
-          <a:p/>
-          <a:p>
-            <a:r>
-              <a:t>Only this test is on screen. The second and third come later, each in its own</a:t>
-            </a:r>
-          </a:p>
-          <a:p>
-            <a:r>
-              <a:t>moment.</a:t>
+              <a:t>Timing: approximately 2:02, holding to about 2:06.</a:t>
+            </a:r>
+          </a:p>
+          <a:p>
+            <a:r>
+              <a:t>Section card. Hold briefly, then return to presenter.</a:t>
             </a:r>
           </a:p>
         </p:txBody>
@@ -1335,56 +1129,32 @@
           <a:lstStyle/>
           <a:p>
             <a:r>
-              <a:t>Timing: 2:03-3:15</a:t>
-            </a:r>
-          </a:p>
-          <a:p/>
-          <a:p>
-            <a:r>
-              <a:t>Speak from ideas. Show the company-bound sentence first, then the clearer</a:t>
-            </a:r>
-          </a:p>
-          <a:p>
-            <a:r>
-              <a:t>description.</a:t>
-            </a:r>
-          </a:p>
-          <a:p/>
-          <a:p>
-            <a:r>
-              <a:t>What remains after the nouns come out should still tell another person what</a:t>
-            </a:r>
-          </a:p>
-          <a:p>
-            <a:r>
-              <a:t>problem you solve and what judgment the work requires.</a:t>
-            </a:r>
-          </a:p>
-          <a:p/>
-          <a:p>
-            <a:r>
-              <a:t>Viewer action: take one sentence from your resume, your LinkedIn profile or</a:t>
-            </a:r>
-          </a:p>
-          <a:p>
-            <a:r>
-              <a:t>the way you introduce your work. Remove the company nouns. If the sentence</a:t>
-            </a:r>
-          </a:p>
-          <a:p>
-            <a:r>
-              <a:t>collapses, rewrite it around the problem you solve and the judgment you bring.</a:t>
-            </a:r>
-          </a:p>
-          <a:p/>
-          <a:p>
-            <a:r>
-              <a:t>The example is generic. Keep it that way; no employer-specific or</a:t>
-            </a:r>
-          </a:p>
-          <a:p>
-            <a:r>
-              <a:t>confidential material.</a:t>
+              <a:t>Timing: approximately 2:06.</a:t>
+            </a:r>
+          </a:p>
+          <a:p>
+            <a:r>
+              <a:t>Show the company-bound sentence first, then the clearer description.</a:t>
+            </a:r>
+          </a:p>
+          <a:p>
+            <a:r>
+              <a:t>What remains after the nouns come out should still tell another person what problem the viewer solves and what judgment the work requires.</a:t>
+            </a:r>
+          </a:p>
+          <a:p>
+            <a:r>
+              <a:t>Note the direct-address framing: Temidayo says "Say you tell me: 'I own the QBR process for this business unit.'" and then "Outside it, I mostly hear the name of a process." She is standing in as the listener across the table. Keep her on camera for those two lines so the exchange reads as a conversation.</a:t>
+            </a:r>
+          </a:p>
+          <a:p>
+            <a:r>
+              <a:t>Viewer action: one sentence from a résumé, a LinkedIn profile or the way they introduce their work.</a:t>
+            </a:r>
+          </a:p>
+          <a:p>
+            <a:r>
+              <a:t>The example is generic. Keep it that way; no employer-specific or confidential material.</a:t>
             </a:r>
           </a:p>
         </p:txBody>
@@ -1454,24 +1224,12 @@
           <a:lstStyle/>
           <a:p>
             <a:r>
-              <a:t>Timing: 3:15-3:23</a:t>
-            </a:r>
-          </a:p>
-          <a:p/>
-          <a:p>
-            <a:r>
-              <a:t>A section break, four to seven seconds. Say: "The second test is to find</a:t>
-            </a:r>
-          </a:p>
-          <a:p>
-            <a:r>
-              <a:t>evidence that your capability has been useful outside its original context."</a:t>
-            </a:r>
-          </a:p>
-          <a:p/>
-          <a:p>
-            <a:r>
-              <a:t>Do not restate the first test. The evidence slide follows.</a:t>
+              <a:t>Timing: approximately 3:14, holding to about 3:17.</a:t>
+            </a:r>
+          </a:p>
+          <a:p>
+            <a:r>
+              <a:t>Section card. Hold briefly, then return to presenter.</a:t>
             </a:r>
           </a:p>
         </p:txBody>
@@ -1541,66 +1299,27 @@
           <a:lstStyle/>
           <a:p>
             <a:r>
-              <a:t>Timing: 3:23-4:35</a:t>
-            </a:r>
-          </a:p>
-          <a:p/>
-          <a:p>
-            <a:r>
-              <a:t>Speak from ideas. Reveal one source at a time. Keep it simple; this is not a</a:t>
-            </a:r>
-          </a:p>
-          <a:p>
-            <a:r>
-              <a:t>list of credentials.</a:t>
-            </a:r>
-          </a:p>
-          <a:p/>
-          <a:p>
-            <a:r>
-              <a:t>Outside-context evidence does not mean job offers or public visibility. Do not</a:t>
-            </a:r>
-          </a:p>
-          <a:p>
-            <a:r>
-              <a:t>count visibility by itself as proof. The question is whether the judgment was</a:t>
-            </a:r>
-          </a:p>
-          <a:p>
-            <a:r>
-              <a:t>actually useful beyond the original context.</a:t>
-            </a:r>
-          </a:p>
-          <a:p/>
-          <a:p>
-            <a:r>
-              <a:t>Viewer action: write down one example where your judgment was useful beyond</a:t>
-            </a:r>
-          </a:p>
-          <a:p>
-            <a:r>
-              <a:t>your immediate role, team or employer. If you cannot find one yet, that is</a:t>
-            </a:r>
-          </a:p>
-          <a:p>
-            <a:r>
-              <a:t>useful information to investigate.</a:t>
-            </a:r>
-          </a:p>
-          <a:p/>
-          <a:p>
-            <a:r>
-              <a:t>Say why indispensability can mislead: an organization may depend on you</a:t>
-            </a:r>
-          </a:p>
-          <a:p>
-            <a:r>
-              <a:t>because knowledge, relationships or a fragile process run through you. That</a:t>
-            </a:r>
-          </a:p>
-          <a:p>
-            <a:r>
-              <a:t>raises internal importance without raising what you can do somewhere else.</a:t>
+              <a:t>Timing: approximately 3:17.</a:t>
+            </a:r>
+          </a:p>
+          <a:p>
+            <a:r>
+              <a:t>Reveal the evidence types one at a time as each is named.</a:t>
+            </a:r>
+          </a:p>
+          <a:p>
+            <a:r>
+              <a:t>The evidence can be small. It only has to show that the usefulness survived some distance from where it was formed.</a:t>
+            </a:r>
+          </a:p>
+          <a:p>
+            <a:r>
+              <a:t>This is where the indispensable trap is named — and in v3.0 it is named at the viewer: "This is where being indispensable can mislead you." Do not soften it into a general observation, and do not turn it into a warning.</a:t>
+            </a:r>
+          </a:p>
+          <a:p>
+            <a:r>
+              <a:t>Close on the permission line: if the viewer cannot think of an example yet, that is not a verdict on them. It is something to go and test.</a:t>
             </a:r>
           </a:p>
         </p:txBody>
@@ -1670,24 +1389,12 @@
           <a:lstStyle/>
           <a:p>
             <a:r>
-              <a:t>Timing: 4:35-4:43</a:t>
-            </a:r>
-          </a:p>
-          <a:p/>
-          <a:p>
-            <a:r>
-              <a:t>A section break, four to seven seconds. Say: "The third test is to read the</a:t>
-            </a:r>
-          </a:p>
-          <a:p>
-            <a:r>
-              <a:t>last 90 days."</a:t>
-            </a:r>
-          </a:p>
-          <a:p/>
-          <a:p>
-            <a:r>
-              <a:t>Do not restate the first two. The judgment slide follows.</a:t>
+              <a:t>Timing: approximately 4:38, holding to about 4:42.</a:t>
+            </a:r>
+          </a:p>
+          <a:p>
+            <a:r>
+              <a:t>Section card. Hold briefly, then return to presenter.</a:t>
             </a:r>
           </a:p>
         </p:txBody>
@@ -1757,46 +1464,17 @@
           <a:lstStyle/>
           <a:p>
             <a:r>
-              <a:t>Timing: 4:43-5:55</a:t>
-            </a:r>
-          </a:p>
-          <a:p/>
-          <a:p>
-            <a:r>
-              <a:t>Speak from ideas. Hold the contrast first, then reveal the prompts one at a</a:t>
-            </a:r>
-          </a:p>
-          <a:p>
-            <a:r>
-              <a:t>time. Let the contrast breathe.</a:t>
-            </a:r>
-          </a:p>
-          <a:p/>
-          <a:p>
-            <a:r>
-              <a:t>New judgment might come from a more ambiguous problem, a decision made with</a:t>
-            </a:r>
-          </a:p>
-          <a:p>
-            <a:r>
-              <a:t>incomplete information, influencing a different group, working across a new</a:t>
-            </a:r>
-          </a:p>
-          <a:p>
-            <a:r>
-              <a:t>constraint, or building judgment where you previously needed help.</a:t>
-            </a:r>
-          </a:p>
-          <a:p/>
-          <a:p>
-            <a:r>
-              <a:t>Gem to land: "Speed has value. New judgment tells you something different."</a:t>
-            </a:r>
-          </a:p>
-          <a:p/>
-          <a:p>
-            <a:r>
-              <a:t>Do not ask only whether you were busy or whether you performed well.</a:t>
+              <a:t>Timing: approximately 4:42.</a:t>
+            </a:r>
+          </a:p>
+          <a:p>
+            <a:r>
+              <a:t>Reveal the three questions one at a time, then the new-judgment versus same-work-faster contrast.</a:t>
+            </a:r>
+          </a:p>
+          <a:p>
+            <a:r>
+              <a:t>Speed and efficiency are not dismissed. Temidayo says so explicitly. The distinction is proficiency versus expansion, and the edit should not tip it into a criticism of anyone who has become faster at familiar work.</a:t>
             </a:r>
           </a:p>
         </p:txBody>
@@ -1866,35 +1544,17 @@
           <a:lstStyle/>
           <a:p>
             <a:r>
-              <a:t>Timing: 5:55-6:25</a:t>
-            </a:r>
-          </a:p>
-          <a:p/>
-          <a:p>
-            <a:r>
-              <a:t>The first and only moment all three tests appear together.</a:t>
-            </a:r>
-          </a:p>
-          <a:p/>
-          <a:p>
-            <a:r>
-              <a:t>Name them once, in order: remove the company nouns, find outside-context</a:t>
-            </a:r>
-          </a:p>
-          <a:p>
-            <a:r>
-              <a:t>evidence, read the last 90 days. Do not teach them again.</a:t>
-            </a:r>
-          </a:p>
-          <a:p/>
-          <a:p>
-            <a:r>
-              <a:t>Gem to land: "Internal value and external marketability are two different</a:t>
-            </a:r>
-          </a:p>
-          <a:p>
-            <a:r>
-              <a:t>questions."</a:t>
+              <a:t>Timing: approximately 5:43.</a:t>
+            </a:r>
+          </a:p>
+          <a:p>
+            <a:r>
+              <a:t>The consolidation card. Reveal the three in order.</a:t>
+            </a:r>
+          </a:p>
+          <a:p>
+            <a:r>
+              <a:t>Do not add a fourth item, an acronym or a slogan. The three tests are the only memory device in this video.</a:t>
             </a:r>
           </a:p>
         </p:txBody>

--- a/deliverables/video-2-slides/out/Video-2-Is-Your-Job-Making-You-Less-Marketable_v1.1.pptx
+++ b/deliverables/video-2-slides/out/Video-2-Is-Your-Job-Making-You-Less-Marketable_v1.1.pptx
@@ -784,7 +784,7 @@
           </a:p>
           <a:p>
             <a:r>
-              <a:t>Exact invitation, verbatim from the v3.0 script:</a:t>
+              <a:t>Exact invitation, verbatim from the v4.0 script:</a:t>
             </a:r>
           </a:p>
           <a:p>
@@ -874,7 +874,7 @@
           </a:p>
           <a:p>
             <a:r>
-              <a:t>Exact bridge, verbatim from the v3.0 script:</a:t>
+              <a:t>Exact bridge, verbatim from the v4.0 script:</a:t>
             </a:r>
           </a:p>
           <a:p>
@@ -1314,7 +1314,7 @@
           </a:p>
           <a:p>
             <a:r>
-              <a:t>This is where the indispensable trap is named — and in v3.0 it is named at the viewer: "This is where being indispensable can mislead you." Do not soften it into a general observation, and do not turn it into a warning.</a:t>
+              <a:t>This is where the indispensable trap is named — and in v4.0 it is named at the viewer: "This is where being indispensable can mislead you." Do not soften it into a general observation, and do not turn it into a warning.</a:t>
             </a:r>
           </a:p>
           <a:p>

--- a/deliverables/video-2-slides/out/Video-2-Is-Your-Job-Making-You-Less-Marketable_v1.1.pptx
+++ b/deliverables/video-2-slides/out/Video-2-Is-Your-Job-Making-You-Less-Marketable_v1.1.pptx
@@ -884,7 +884,7 @@
           </a:p>
           <a:p>
             <a:r>
-              <a:t>DECK DEFECT — NOT FIXED. This card still reads "Before You Quit Your Job, Check These 3 Things", which is the RETIRED Video 3 title. The locked title is "3 Things to Do Before Quitting Your Job", which is what Temidayo says. No slide XML change was authorised in this pass. Until the card is corrected, do not hold it on screen while she names the video: stay on Temidayo, or cut to the end-screen route.</a:t>
+              <a:t>WATCH NEXT CARD CORRECTED, 3 September 2026. This card previously carried the retired Video 3 title. It now reads "3 Things to Do Before Quitting Your Job", the locked Video 3 title, matching what Temidayo says. The correction was text only: same 40pt Montserrat Bold, same three-line block, same box, same colours, no media change. You can hold the card on screen while she names the video.</a:t>
             </a:r>
           </a:p>
           <a:p>
@@ -6524,7 +6524,7 @@
                 <a:ea typeface="Montserrat"/>
                 <a:cs typeface="Montserrat"/>
               </a:rPr>
-              <a:t>Before You Quit</a:t>
+              <a:t>3 Things to Do</a:t>
             </a:r>
             <a:br/>
             <a:r>
@@ -6536,7 +6536,7 @@
                 <a:ea typeface="Montserrat"/>
                 <a:cs typeface="Montserrat"/>
               </a:rPr>
-              <a:t>Your Job, Check</a:t>
+              <a:t>Before Quitting</a:t>
             </a:r>
             <a:br/>
             <a:r>
@@ -6548,7 +6548,7 @@
                 <a:ea typeface="Montserrat"/>
                 <a:cs typeface="Montserrat"/>
               </a:rPr>
-              <a:t>These 3 Things</a:t>
+              <a:t>Your Job</a:t>
             </a:r>
           </a:p>
         </p:txBody>

--- a/deliverables/video-2-slides/out/Video-2-Is-Your-Job-Making-You-Less-Marketable_v1.1.pptx
+++ b/deliverables/video-2-slides/out/Video-2-Is-Your-Job-Making-You-Less-Marketable_v1.1.pptx
@@ -514,27 +514,27 @@
           <a:lstStyle/>
           <a:p>
             <a:r>
-              <a:t>Timing: approximately 0:38 to 0:57.</a:t>
-            </a:r>
-          </a:p>
-          <a:p>
-            <a:r>
-              <a:t>Do NOT open on this slide. Begin full-screen on Temidayo and let the whole H.I.T. opening land first: the hook, the viewer bridge, her own cross-industry proof, the valuable-here / legible-elsewhere line and the three-test promise.</a:t>
-            </a:r>
-          </a:p>
-          <a:p>
-            <a:r>
-              <a:t>Bring the title up under the channel line: "I'm Temidayo Afonja. I help experienced professionals understand what their work has built, what can travel, and what still has to be learned when the context changes. And that is what I want to help you do here."</a:t>
-            </a:r>
-          </a:p>
-          <a:p>
-            <a:r>
-              <a:t>That second sentence is the turn from positioning to relationship. Stay on her face for it.</a:t>
-            </a:r>
-          </a:p>
-          <a:p>
-            <a:r>
-              <a:t>Do not make the opening alarmist.</a:t>
+              <a:t>Timing: approximately 0:34 to 1:21.</a:t>
+            </a:r>
+          </a:p>
+          <a:p>
+            <a:r>
+              <a:t>Do NOT open on this slide. Begin full-screen on Temidayo and let the opening land: the compliment that is meant, the private question, "I have had to answer that question about myself more than once", and the promise that this is not a scare video.</a:t>
+            </a:r>
+          </a:p>
+          <a:p>
+            <a:r>
+              <a:t>Recognition comes before anything is taught.</a:t>
+            </a:r>
+          </a:p>
+          <a:p>
+            <a:r>
+              <a:t>Bring the title up under the channel line, then hold for the tone-setting block: being valuable where you are is real value, it is not a trap and not a warning sign. Being paid well, being trusted, being the person everyone calls — none of that is the problem.</a:t>
+            </a:r>
+          </a:p>
+          <a:p>
+            <a:r>
+              <a:t>NON-ALARMIST IS A HARD RULE for this whole video. No red, no warning graphics, no countdown, no urgency motifs, anywhere.</a:t>
             </a:r>
           </a:p>
         </p:txBody>
@@ -604,7 +604,7 @@
           <a:lstStyle/>
           <a:p>
             <a:r>
-              <a:t>Timing: approximately 5:58.</a:t>
+              <a:t>Timing: approximately 7:21.</a:t>
             </a:r>
           </a:p>
           <a:p>
@@ -614,12 +614,12 @@
           </a:p>
           <a:p>
             <a:r>
-              <a:t>The governing line is hers and it is addressed to the viewer: "I am not asking you to diagnose yourself from one quarter or one frustrating assignment. What matters is the pattern."</a:t>
-            </a:r>
-          </a:p>
-          <a:p>
-            <a:r>
-              <a:t>No diagnostic tone. No scorecard treatment.</a:t>
+              <a:t>Two lines carry the tone here: "That is a translation problem, not a value problem", and "Not panic. Attention." Neither may be cut.</a:t>
+            </a:r>
+          </a:p>
+          <a:p>
+            <a:r>
+              <a:t>One quarter is not a pattern. No diagnostic treatment, no scorecard.</a:t>
             </a:r>
           </a:p>
         </p:txBody>
@@ -689,27 +689,32 @@
           <a:lstStyle/>
           <a:p>
             <a:r>
-              <a:t>Timing: approximately 6:50.</a:t>
-            </a:r>
-          </a:p>
-          <a:p>
-            <a:r>
-              <a:t>Progressive reveal, one option at a time.</a:t>
-            </a:r>
-          </a:p>
-          <a:p>
-            <a:r>
-              <a:t>This is the section that keeps the video non-alarmist, so give it room. A concern in one test does not mean resign.</a:t>
-            </a:r>
-          </a:p>
-          <a:p>
-            <a:r>
-              <a:t>The documentation option keeps its boundary verbatim: in the viewer's own words, at a permitted high level, without taking confidential or employer-owned material. Do not trim that qualifier.</a:t>
-            </a:r>
-          </a:p>
-          <a:p>
-            <a:r>
-              <a:t>Close on "Before you change the employer, test whether you can change what the work is building in you." </a:t>
+              <a:t>Timing: approximately 8:19.</a:t>
+            </a:r>
+          </a:p>
+          <a:p>
+            <a:r>
+              <a:t>The section that keeps the video honest, and the longest single stretch. Give it room.</a:t>
+            </a:r>
+          </a:p>
+          <a:p>
+            <a:r>
+              <a:t>Progressive reveal of the four options. The documentation option keeps its boundary verbatim: in your own words, at a level you are permitted to share, nothing confidential or employer-owned.</a:t>
+            </a:r>
+          </a:p>
+          <a:p>
+            <a:r>
+              <a:t>Then the honest limits, spoken plainly: this will not stop a restructure, or control a hiring market or a reorg. What it changes is WHEN you find out.</a:t>
+            </a:r>
+          </a:p>
+          <a:p>
+            <a:r>
+              <a:t>IDENTITY EXIT, at about 10:01: "Not a plan for leaving. The habit of checking — so you are the person who already knows what you carry, before anybody else makes the timing decision for you."</a:t>
+            </a:r>
+          </a:p>
+          <a:p>
+            <a:r>
+              <a:t>That is the point of the video. If the edit runs long, cut something else.</a:t>
             </a:r>
           </a:p>
         </p:txBody>
@@ -779,27 +784,22 @@
           <a:lstStyle/>
           <a:p>
             <a:r>
-              <a:t>Timing: approximately 7:49.</a:t>
-            </a:r>
-          </a:p>
-          <a:p>
-            <a:r>
-              <a:t>Exact invitation, verbatim from the v4.0 script:</a:t>
-            </a:r>
-          </a:p>
-          <a:p>
-            <a:r>
-              <a:t>"If these three tests tell you that you need a fuller read of what your current work is building and how portable it is, the Capability Formation Field Kit gives you a private, evidence-led assessment using the last 90 days of your actual work. It helps you see what is growing, what may be stalling, what looks portable and what you still need to investigate before you decide what comes next. You can find it at temidayoafonja.com/fieldkit."</a:t>
-            </a:r>
-          </a:p>
-          <a:p>
-            <a:r>
-              <a:t>Calm and brief. This is the only resource invitation in the video. Show the real Field Kit artwork briefly. Do not add Keep the Proof or the Career Evidence Starter.</a:t>
-            </a:r>
-          </a:p>
-          <a:p>
-            <a:r>
-              <a:t>Before publishing, verify the live /fieldkit redirect and the current listing.</a:t>
+              <a:t>Timing: approximately 10:16.</a:t>
+            </a:r>
+          </a:p>
+          <a:p>
+            <a:r>
+              <a:t>Calm and brief. The only resource invitation in the video, and it is the Capability Formation Field Kit.</a:t>
+            </a:r>
+          </a:p>
+          <a:p>
+            <a:r>
+              <a:t>It lands AFTER the identity bridge, so it reads as the next step rather than an advert. Keep that order. Do not add Keep the Proof or the Career Evidence Starter.</a:t>
+            </a:r>
+          </a:p>
+          <a:p>
+            <a:r>
+              <a:t>Show the real Field Kit artwork briefly. Before publishing, verify the live /fieldkit redirect and the current listing.</a:t>
             </a:r>
           </a:p>
         </p:txBody>
@@ -869,27 +869,22 @@
           <a:lstStyle/>
           <a:p>
             <a:r>
-              <a:t>Timing: approximately 8:21 to the end, about 8:40.</a:t>
-            </a:r>
-          </a:p>
-          <a:p>
-            <a:r>
-              <a:t>Exact bridge, verbatim from the v4.0 script:</a:t>
-            </a:r>
-          </a:p>
-          <a:p>
-            <a:r>
-              <a:t>"And if what you are seeing has you seriously considering an exit, do not move straight from concern to resignation. There are three things I want you to check first. That is the next video: 3 Things to Do Before Quitting Your Job. Watch that one next."</a:t>
-            </a:r>
-          </a:p>
-          <a:p>
-            <a:r>
-              <a:t>WATCH NEXT CARD CORRECTED, 3 September 2026. This card previously carried the retired Video 3 title. It now reads "3 Things to Do Before Quitting Your Job", the locked Video 3 title, matching what Temidayo says. The correction was text only: same 40pt Montserrat Bold, same three-line block, same box, same colours, no media change. You can hold the card on screen while she names the video.</a:t>
-            </a:r>
-          </a:p>
-          <a:p>
-            <a:r>
-              <a:t>Do not summarize this video again.</a:t>
+              <a:t>Timing: approximately 10:49 to the end, about 11:15.</a:t>
+            </a:r>
+          </a:p>
+          <a:p>
+            <a:r>
+              <a:t>This card was corrected: it reads "3 Things to Do Before Quitting Your Job", the locked Video 3 title, matching what Temidayo says. You can hold it on screen while she names the video.</a:t>
+            </a:r>
+          </a:p>
+          <a:p>
+            <a:r>
+              <a:t>Closing lines: "Being valuable here is worth having. Being understood elsewhere is worth building." Stay on her for both.</a:t>
+            </a:r>
+          </a:p>
+          <a:p>
+            <a:r>
+              <a:t>Do not summarize the video again.</a:t>
             </a:r>
           </a:p>
           <a:p>
@@ -964,27 +959,22 @@
           <a:lstStyle/>
           <a:p>
             <a:r>
-              <a:t>Timing: approximately 0:57.</a:t>
-            </a:r>
-          </a:p>
-          <a:p>
-            <a:r>
-              <a:t>This is the central idea of the video. Let it sit.</a:t>
-            </a:r>
-          </a:p>
-          <a:p>
-            <a:r>
-              <a:t>Reveal the second question after the first has been asked, not before.</a:t>
-            </a:r>
-          </a:p>
-          <a:p>
-            <a:r>
-              <a:t>Temidayo is careful here and the edit must not undercut her: being relied on is real value, and none of this implies the viewer should leave. The closing beat of this section is "Praise tells you that you matter here. It cannot tell you how easily what you do travels."</a:t>
-            </a:r>
-          </a:p>
-          <a:p>
-            <a:r>
-              <a:t>Non-alarmist. No warning graphics, no red, no urgency motifs.</a:t>
+              <a:t>Timing: approximately 1:21.</a:t>
+            </a:r>
+          </a:p>
+          <a:p>
+            <a:r>
+              <a:t>The central distinction. Reveal the second question after the first has landed.</a:t>
+            </a:r>
+          </a:p>
+          <a:p>
+            <a:r>
+              <a:t>This section explains the mechanism, and it must stay generous: the viewer's knowledge is real skill, some of it just belongs to the room they are standing in. The company knows why they matter because they watched it happen. Another company is not being unfair — it simply cannot read the evidence.</a:t>
+            </a:r>
+          </a:p>
+          <a:p>
+            <a:r>
+              <a:t>Closing beat: "praise tells you that you matter here. It cannot tell you how easily what you do travels." Let it sit before the tests begin.</a:t>
             </a:r>
           </a:p>
         </p:txBody>
@@ -1054,12 +1044,17 @@
           <a:lstStyle/>
           <a:p>
             <a:r>
-              <a:t>Timing: approximately 2:02, holding to about 2:06.</a:t>
-            </a:r>
-          </a:p>
-          <a:p>
-            <a:r>
-              <a:t>Section card. Hold briefly, then return to presenter.</a:t>
+              <a:t>Timing: approximately 2:50, holding to about 2:53.</a:t>
+            </a:r>
+          </a:p>
+          <a:p>
+            <a:r>
+              <a:t>Section card. Hold briefly, then back to presenter.</a:t>
+            </a:r>
+          </a:p>
+          <a:p>
+            <a:r>
+              <a:t>Note that the framework does not arrive until nearly three minutes. That is deliberate: the viewer is identified before they are taught.</a:t>
             </a:r>
           </a:p>
         </p:txBody>
@@ -1129,32 +1124,27 @@
           <a:lstStyle/>
           <a:p>
             <a:r>
-              <a:t>Timing: approximately 2:06.</a:t>
-            </a:r>
-          </a:p>
-          <a:p>
-            <a:r>
-              <a:t>Show the company-bound sentence first, then the clearer description.</a:t>
-            </a:r>
-          </a:p>
-          <a:p>
-            <a:r>
-              <a:t>What remains after the nouns come out should still tell another person what problem the viewer solves and what judgment the work requires.</a:t>
-            </a:r>
-          </a:p>
-          <a:p>
-            <a:r>
-              <a:t>Note the direct-address framing: Temidayo says "Say you tell me: 'I own the QBR process for this business unit.'" and then "Outside it, I mostly hear the name of a process." She is standing in as the listener across the table. Keep her on camera for those two lines so the exchange reads as a conversation.</a:t>
-            </a:r>
-          </a:p>
-          <a:p>
-            <a:r>
-              <a:t>Viewer action: one sentence from a résumé, a LinkedIn profile or the way they introduce their work.</a:t>
-            </a:r>
-          </a:p>
-          <a:p>
-            <a:r>
-              <a:t>The example is generic. Keep it that way; no employer-specific or confidential material.</a:t>
+              <a:t>Timing: approximately 2:53.</a:t>
+            </a:r>
+          </a:p>
+          <a:p>
+            <a:r>
+              <a:t>Show the company-bound sentence first, then the version that travels.</a:t>
+            </a:r>
+          </a:p>
+          <a:p>
+            <a:r>
+              <a:t>Temidayo stands in as the listener — "Outside it, I hear the name of a process. I do not know what you are actually good at." Keep her on camera so it reads as a conversation.</a:t>
+            </a:r>
+          </a:p>
+          <a:p>
+            <a:r>
+              <a:t>FACTUAL BOUNDARY: the QBR sentence is a generic example, not a real client. No employer, metric or result anywhere in this video.</a:t>
+            </a:r>
+          </a:p>
+          <a:p>
+            <a:r>
+              <a:t>Close on the reassurance: if the sentence collapses, the value is real and the description was simply built for an audience that already knew them.</a:t>
             </a:r>
           </a:p>
         </p:txBody>
@@ -1224,12 +1214,12 @@
           <a:lstStyle/>
           <a:p>
             <a:r>
-              <a:t>Timing: approximately 3:14, holding to about 3:17.</a:t>
-            </a:r>
-          </a:p>
-          <a:p>
-            <a:r>
-              <a:t>Section card. Hold briefly, then return to presenter.</a:t>
+              <a:t>Timing: approximately 4:16, holding to about 4:22.</a:t>
+            </a:r>
+          </a:p>
+          <a:p>
+            <a:r>
+              <a:t>Section card. Hold briefly, then back to presenter.</a:t>
             </a:r>
           </a:p>
         </p:txBody>
@@ -1299,27 +1289,27 @@
           <a:lstStyle/>
           <a:p>
             <a:r>
-              <a:t>Timing: approximately 3:17.</a:t>
-            </a:r>
-          </a:p>
-          <a:p>
-            <a:r>
-              <a:t>Reveal the evidence types one at a time as each is named.</a:t>
-            </a:r>
-          </a:p>
-          <a:p>
-            <a:r>
-              <a:t>The evidence can be small. It only has to show that the usefulness survived some distance from where it was formed.</a:t>
-            </a:r>
-          </a:p>
-          <a:p>
-            <a:r>
-              <a:t>This is where the indispensable trap is named — and in v4.0 it is named at the viewer: "This is where being indispensable can mislead you." Do not soften it into a general observation, and do not turn it into a warning.</a:t>
-            </a:r>
-          </a:p>
-          <a:p>
-            <a:r>
-              <a:t>Close on the permission line: if the viewer cannot think of an example yet, that is not a verdict on them. It is something to go and test.</a:t>
+              <a:t>Timing: approximately 4:22.</a:t>
+            </a:r>
+          </a:p>
+          <a:p>
+            <a:r>
+              <a:t>Reveal the evidence types one at a time.</a:t>
+            </a:r>
+          </a:p>
+          <a:p>
+            <a:r>
+              <a:t>This test is explicitly not about visibility or popularity. No job offer, no audience, no public profile required. Say that plainly.</a:t>
+            </a:r>
+          </a:p>
+          <a:p>
+            <a:r>
+              <a:t>The indispensable trap is named at the viewer and stays even-handed: depending on you raises how much they need you; it does not automatically make you easier for anyone else to understand. Two different kinds of value.</a:t>
+            </a:r>
+          </a:p>
+          <a:p>
+            <a:r>
+              <a:t>Close on the permission line: if nothing comes to mind yet, that is not a verdict — it is something untested.</a:t>
             </a:r>
           </a:p>
         </p:txBody>
@@ -1389,12 +1379,12 @@
           <a:lstStyle/>
           <a:p>
             <a:r>
-              <a:t>Timing: approximately 4:38, holding to about 4:42.</a:t>
-            </a:r>
-          </a:p>
-          <a:p>
-            <a:r>
-              <a:t>Section card. Hold briefly, then return to presenter.</a:t>
+              <a:t>Timing: approximately 5:56, holding to about 6:00.</a:t>
+            </a:r>
+          </a:p>
+          <a:p>
+            <a:r>
+              <a:t>Section card. Hold briefly, then back to presenter.</a:t>
             </a:r>
           </a:p>
         </p:txBody>
@@ -1464,17 +1454,17 @@
           <a:lstStyle/>
           <a:p>
             <a:r>
-              <a:t>Timing: approximately 4:42.</a:t>
-            </a:r>
-          </a:p>
-          <a:p>
-            <a:r>
-              <a:t>Reveal the three questions one at a time, then the new-judgment versus same-work-faster contrast.</a:t>
-            </a:r>
-          </a:p>
-          <a:p>
-            <a:r>
-              <a:t>Speed and efficiency are not dismissed. Temidayo says so explicitly. The distinction is proficiency versus expansion, and the edit should not tip it into a criticism of anyone who has become faster at familiar work.</a:t>
+              <a:t>Timing: approximately 6:00.</a:t>
+            </a:r>
+          </a:p>
+          <a:p>
+            <a:r>
+              <a:t>Reveal the three questions, then the new-judgment versus same-work-faster contrast.</a:t>
+            </a:r>
+          </a:p>
+          <a:p>
+            <a:r>
+              <a:t>Speed is not dismissed. The line to protect is "You can get much better at work you already know how to do. That is real, and it is not the same thing as your range getting bigger." Both are allowed to be fine.</a:t>
             </a:r>
           </a:p>
         </p:txBody>
@@ -1544,12 +1534,12 @@
           <a:lstStyle/>
           <a:p>
             <a:r>
-              <a:t>Timing: approximately 5:43.</a:t>
-            </a:r>
-          </a:p>
-          <a:p>
-            <a:r>
-              <a:t>The consolidation card. Reveal the three in order.</a:t>
+              <a:t>Timing: approximately 7:07.</a:t>
+            </a:r>
+          </a:p>
+          <a:p>
+            <a:r>
+              <a:t>The consolidation card. Reveal the three tests in order.</a:t>
             </a:r>
           </a:p>
           <a:p>

--- a/deliverables/video-2-slides/out/Video-2-Is-Your-Job-Making-You-Less-Marketable_v1.1.pptx
+++ b/deliverables/video-2-slides/out/Video-2-Is-Your-Job-Making-You-Less-Marketable_v1.1.pptx
@@ -514,27 +514,37 @@
           <a:lstStyle/>
           <a:p>
             <a:r>
-              <a:t>Timing: approximately 0:34 to 1:21.</a:t>
-            </a:r>
-          </a:p>
-          <a:p>
-            <a:r>
-              <a:t>Do NOT open on this slide. Begin full-screen on Temidayo and let the opening land: the compliment that is meant, the private question, "I have had to answer that question about myself more than once", and the promise that this is not a scare video.</a:t>
-            </a:r>
-          </a:p>
-          <a:p>
-            <a:r>
-              <a:t>Recognition comes before anything is taught.</a:t>
-            </a:r>
-          </a:p>
-          <a:p>
-            <a:r>
-              <a:t>Bring the title up under the channel line, then hold for the tone-setting block: being valuable where you are is real value, it is not a trap and not a warning sign. Being paid well, being trusted, being the person everyone calls — none of that is the problem.</a:t>
-            </a:r>
-          </a:p>
-          <a:p>
-            <a:r>
-              <a:t>NON-ALARMIST IS A HARD RULE for this whole video. No red, no warning graphics, no countdown, no urgency motifs, anywhere.</a:t>
+              <a:t>Timing: approximately 0:34.</a:t>
+            </a:r>
+          </a:p>
+          <a:p>
+            <a:r>
+              <a:t>Slide 1 — Title.</a:t>
+            </a:r>
+          </a:p>
+          <a:p>
+            <a:r>
+              <a:t>Cue — the line that lands on this slide: “I’m Temidayo Afonja.”</a:t>
+            </a:r>
+          </a:p>
+          <a:p>
+            <a:r>
+              <a:t>Do NOT open on this slide. Begin full screen on Temidayo. The opening is four beats: the compliment, the private question, “I have had to answer that question about myself more than once”, and the three tests.</a:t>
+            </a:r>
+          </a:p>
+          <a:p>
+            <a:r>
+              <a:t>Bring the title card in only on “I’m Temidayo Afonja.”</a:t>
+            </a:r>
+          </a:p>
+          <a:p>
+            <a:r>
+              <a:t>NON-ALARMIST IS A HARD RULE for this whole video. What follows on this slide is the explicit reassurance — being valuable where you are is real value, it is not a trap and not a warning sign. If the edit makes praise, pay or being relied on look like a symptom, the video has failed.</a:t>
+            </a:r>
+          </a:p>
+          <a:p>
+            <a:r>
+              <a:t>Single state. Reveal frame 1 in the build deck.</a:t>
             </a:r>
           </a:p>
         </p:txBody>
@@ -604,22 +614,37 @@
           <a:lstStyle/>
           <a:p>
             <a:r>
-              <a:t>Timing: approximately 7:21.</a:t>
-            </a:r>
-          </a:p>
-          <a:p>
-            <a:r>
-              <a:t>Hold the two questions side by side while Temidayo walks the four readings.</a:t>
-            </a:r>
-          </a:p>
-          <a:p>
-            <a:r>
-              <a:t>Two lines carry the tone here: "That is a translation problem, not a value problem", and "Not panic. Attention." Neither may be cut.</a:t>
-            </a:r>
-          </a:p>
-          <a:p>
-            <a:r>
-              <a:t>One quarter is not a pattern. No diagnostic treatment, no scorecard.</a:t>
+              <a:t>Timing: approximately 6:43.</a:t>
+            </a:r>
+          </a:p>
+          <a:p>
+            <a:r>
+              <a:t>Slide 10 — Read the Pattern.</a:t>
+            </a:r>
+          </a:p>
+          <a:p>
+            <a:r>
+              <a:t>Cue — the line that lands on this slide: “And I want to tell you how to read them, because one test on one bad quarter tells you nothing.”</a:t>
+            </a:r>
+          </a:p>
+          <a:p>
+            <a:r>
+              <a:t>The two questions held side by side.</a:t>
+            </a:r>
+          </a:p>
+          <a:p>
+            <a:r>
+              <a:t>“Do not diagnose your career from a single quarter.” This slide exists to stop the video producing anxiety from one bad stretch. It is not optional.</a:t>
+            </a:r>
+          </a:p>
+          <a:p>
+            <a:r>
+              <a:t>Close on “Not panic. Attention.” Let it land.</a:t>
+            </a:r>
+          </a:p>
+          <a:p>
+            <a:r>
+              <a:t>Single state. Reveal frame 17 in the build deck.</a:t>
             </a:r>
           </a:p>
         </p:txBody>
@@ -689,32 +714,37 @@
           <a:lstStyle/>
           <a:p>
             <a:r>
-              <a:t>Timing: approximately 8:19.</a:t>
-            </a:r>
-          </a:p>
-          <a:p>
-            <a:r>
-              <a:t>The section that keeps the video honest, and the longest single stretch. Give it room.</a:t>
-            </a:r>
-          </a:p>
-          <a:p>
-            <a:r>
-              <a:t>Progressive reveal of the four options. The documentation option keeps its boundary verbatim: in your own words, at a level you are permitted to share, nothing confidential or employer-owned.</a:t>
-            </a:r>
-          </a:p>
-          <a:p>
-            <a:r>
-              <a:t>Then the honest limits, spoken plainly: this will not stop a restructure, or control a hiring market or a reorg. What it changes is WHEN you find out.</a:t>
-            </a:r>
-          </a:p>
-          <a:p>
-            <a:r>
-              <a:t>IDENTITY EXIT, at about 10:01: "Not a plan for leaving. The habit of checking — so you are the person who already knows what you carry, before anybody else makes the timing decision for you."</a:t>
-            </a:r>
-          </a:p>
-          <a:p>
-            <a:r>
-              <a:t>That is the point of the video. If the edit runs long, cut something else.</a:t>
+              <a:t>Timing: approximately 7:29.</a:t>
+            </a:r>
+          </a:p>
+          <a:p>
+            <a:r>
+              <a:t>Slide 11 — Before You Leave.</a:t>
+            </a:r>
+          </a:p>
+          <a:p>
+            <a:r>
+              <a:t>Cue — the line that lands on this slide: “Which brings me to the part you might assume is coming, and it is not.”</a:t>
+            </a:r>
+          </a:p>
+          <a:p>
+            <a:r>
+              <a:t>The things the viewer could do without going anywhere reveal one at a time.</a:t>
+            </a:r>
+          </a:p>
+          <a:p>
+            <a:r>
+              <a:t>Then the honest limits: this will not stop a restructure, control a hiring market, or turn a bad year into a good one.</a:t>
+            </a:r>
+          </a:p>
+          <a:p>
+            <a:r>
+              <a:t>THE IDENTITY EXIT sits at the end of this slide: “Not a plan for leaving. The habit of checking.” It is the point of the video. If the edit runs long, cut something else.</a:t>
+            </a:r>
+          </a:p>
+          <a:p>
+            <a:r>
+              <a:t>Reveal states: 4. Reveal frame 18–21 in the build deck.</a:t>
             </a:r>
           </a:p>
         </p:txBody>
@@ -784,22 +814,32 @@
           <a:lstStyle/>
           <a:p>
             <a:r>
-              <a:t>Timing: approximately 10:16.</a:t>
-            </a:r>
-          </a:p>
-          <a:p>
-            <a:r>
-              <a:t>Calm and brief. The only resource invitation in the video, and it is the Capability Formation Field Kit.</a:t>
-            </a:r>
-          </a:p>
-          <a:p>
-            <a:r>
-              <a:t>It lands AFTER the identity bridge, so it reads as the next step rather than an advert. Keep that order. Do not add Keep the Proof or the Career Evidence Starter.</a:t>
-            </a:r>
-          </a:p>
-          <a:p>
-            <a:r>
-              <a:t>Show the real Field Kit artwork briefly. Before publishing, verify the live /fieldkit redirect and the current listing.</a:t>
+              <a:t>Timing: approximately 8:46.</a:t>
+            </a:r>
+          </a:p>
+          <a:p>
+            <a:r>
+              <a:t>Slide 12 — Capability Formation Field Kit.</a:t>
+            </a:r>
+          </a:p>
+          <a:p>
+            <a:r>
+              <a:t>Cue — the line that lands on this slide: “If you want a fuller read than three tests can give you, I made the Capability Formation Field Kit.”</a:t>
+            </a:r>
+          </a:p>
+          <a:p>
+            <a:r>
+              <a:t>Show the real Field Kit artwork briefly. One CTA in this video — do not add Keep the Proof or the Career Evidence Starter.</a:t>
+            </a:r>
+          </a:p>
+          <a:p>
+            <a:r>
+              <a:t>Before publishing, verify the live /fieldkit redirect and the current listing.</a:t>
+            </a:r>
+          </a:p>
+          <a:p>
+            <a:r>
+              <a:t>Single state. Reveal frame 22 in the build deck.</a:t>
             </a:r>
           </a:p>
         </p:txBody>
@@ -869,27 +909,37 @@
           <a:lstStyle/>
           <a:p>
             <a:r>
-              <a:t>Timing: approximately 10:49 to the end, about 11:15.</a:t>
-            </a:r>
-          </a:p>
-          <a:p>
-            <a:r>
-              <a:t>This card was corrected: it reads "3 Things to Do Before Quitting Your Job", the locked Video 3 title, matching what Temidayo says. You can hold it on screen while she names the video.</a:t>
-            </a:r>
-          </a:p>
-          <a:p>
-            <a:r>
-              <a:t>Closing lines: "Being valuable here is worth having. Being understood elsewhere is worth building." Stay on her for both.</a:t>
-            </a:r>
-          </a:p>
-          <a:p>
-            <a:r>
-              <a:t>Do not summarize the video again.</a:t>
-            </a:r>
-          </a:p>
-          <a:p>
-            <a:r>
-              <a:t>The right side of the frame is left open for the YouTube linked-video end-screen element. Hold the final frame for at least 12 seconds.</a:t>
+              <a:t>Timing: approximately 9:07.</a:t>
+            </a:r>
+          </a:p>
+          <a:p>
+            <a:r>
+              <a:t>Slide 13 — Watch Next.</a:t>
+            </a:r>
+          </a:p>
+          <a:p>
+            <a:r>
+              <a:t>Cue — the line that lands on this slide: “And if you are further along than checking — if some part of you has already decided — there is a different conversation to have.”</a:t>
+            </a:r>
+          </a:p>
+          <a:p>
+            <a:r>
+              <a:t>The Video 3 route. This card already carries the corrected title, “3 Things to Do Before Quitting Your Job”. Verify it on the recording screen.</a:t>
+            </a:r>
+          </a:p>
+          <a:p>
+            <a:r>
+              <a:t>“I am not going to try to talk you into staying. I want to help you leave with more than exhaustion.” — that is the Video 3 promise, previewed honestly.</a:t>
+            </a:r>
+          </a:p>
+          <a:p>
+            <a:r>
+              <a:t>Sign off clean. No music sting over the last two lines.</a:t>
+            </a:r>
+          </a:p>
+          <a:p>
+            <a:r>
+              <a:t>Single state. Reveal frame 23 in the build deck.</a:t>
             </a:r>
           </a:p>
         </p:txBody>
@@ -959,22 +1009,42 @@
           <a:lstStyle/>
           <a:p>
             <a:r>
-              <a:t>Timing: approximately 1:21.</a:t>
-            </a:r>
-          </a:p>
-          <a:p>
-            <a:r>
-              <a:t>The central distinction. Reveal the second question after the first has landed.</a:t>
-            </a:r>
-          </a:p>
-          <a:p>
-            <a:r>
-              <a:t>This section explains the mechanism, and it must stay generous: the viewer's knowledge is real skill, some of it just belongs to the room they are standing in. The company knows why they matter because they watched it happen. Another company is not being unfair — it simply cannot read the evidence.</a:t>
-            </a:r>
-          </a:p>
-          <a:p>
-            <a:r>
-              <a:t>Closing beat: "praise tells you that you matter here. It cannot tell you how easily what you do travels." Let it sit before the tests begin.</a:t>
+              <a:t>Timing: approximately 1:33.</a:t>
+            </a:r>
+          </a:p>
+          <a:p>
+            <a:r>
+              <a:t>Slide 2 — Valuable Here / Legible Elsewhere.</a:t>
+            </a:r>
+          </a:p>
+          <a:p>
+            <a:r>
+              <a:t>Cue — the line that lands on this slide: “Here is what makes this so hard to notice.”</a:t>
+            </a:r>
+          </a:p>
+          <a:p>
+            <a:r>
+              <a:t>The mechanism slide. Reveal the contrast, then let her talk over it.</a:t>
+            </a:r>
+          </a:p>
+          <a:p>
+            <a:r>
+              <a:t>“Your company knows exactly why you matter. They watched you earn it.” is a compliment and must be delivered as one.</a:t>
+            </a:r>
+          </a:p>
+          <a:p>
+            <a:r>
+              <a:t>“They are not being unfair when they cannot see it. They simply cannot read the evidence.” — this is the line that keeps the video generous about other employers. Keep it.</a:t>
+            </a:r>
+          </a:p>
+          <a:p>
+            <a:r>
+              <a:t>Her own crossings across functions, employers and industries are the proof here. No employer, client, metric or result is attached to this beat, and there is no number anywhere in this video.</a:t>
+            </a:r>
+          </a:p>
+          <a:p>
+            <a:r>
+              <a:t>Single state. Reveal frame 2 in the build deck.</a:t>
             </a:r>
           </a:p>
         </p:txBody>
@@ -1044,17 +1114,27 @@
           <a:lstStyle/>
           <a:p>
             <a:r>
-              <a:t>Timing: approximately 2:50, holding to about 2:53.</a:t>
-            </a:r>
-          </a:p>
-          <a:p>
-            <a:r>
-              <a:t>Section card. Hold briefly, then back to presenter.</a:t>
-            </a:r>
-          </a:p>
-          <a:p>
-            <a:r>
-              <a:t>Note that the framework does not arrive until nearly three minutes. That is deliberate: the viewer is identified before they are taught.</a:t>
+              <a:t>Timing: approximately 2:52.</a:t>
+            </a:r>
+          </a:p>
+          <a:p>
+            <a:r>
+              <a:t>Slide 3 — 01 Remove the Company Nouns.</a:t>
+            </a:r>
+          </a:p>
+          <a:p>
+            <a:r>
+              <a:t>Cue — the line that lands on this slide: “The first test is to remove the company nouns.”</a:t>
+            </a:r>
+          </a:p>
+          <a:p>
+            <a:r>
+              <a:t>Section break only. The three tests do not arrive until about 2:52, which is deliberate — recognition first.</a:t>
+            </a:r>
+          </a:p>
+          <a:p>
+            <a:r>
+              <a:t>Single state. Reveal frame 3 in the build deck.</a:t>
             </a:r>
           </a:p>
         </p:txBody>
@@ -1124,27 +1204,37 @@
           <a:lstStyle/>
           <a:p>
             <a:r>
-              <a:t>Timing: approximately 2:53.</a:t>
-            </a:r>
-          </a:p>
-          <a:p>
-            <a:r>
-              <a:t>Show the company-bound sentence first, then the version that travels.</a:t>
-            </a:r>
-          </a:p>
-          <a:p>
-            <a:r>
-              <a:t>Temidayo stands in as the listener — "Outside it, I hear the name of a process. I do not know what you are actually good at." Keep her on camera so it reads as a conversation.</a:t>
-            </a:r>
-          </a:p>
-          <a:p>
-            <a:r>
-              <a:t>FACTUAL BOUNDARY: the QBR sentence is a generic example, not a real client. No employer, metric or result anywhere in this video.</a:t>
-            </a:r>
-          </a:p>
-          <a:p>
-            <a:r>
-              <a:t>Close on the reassurance: if the sentence collapses, the value is real and the description was simply built for an audience that already knew them.</a:t>
+              <a:t>Timing: approximately 2:56.</a:t>
+            </a:r>
+          </a:p>
+          <a:p>
+            <a:r>
+              <a:t>Slide 4 — Test One.</a:t>
+            </a:r>
+          </a:p>
+          <a:p>
+            <a:r>
+              <a:t>Cue — the line that lands on this slide: “Take one sentence you would use to describe your work, and delete every word that only exists inside your employer.”</a:t>
+            </a:r>
+          </a:p>
+          <a:p>
+            <a:r>
+              <a:t>The before and after sentence is the centre of this slide. Reveal the before, let it sit, then the after.</a:t>
+            </a:r>
+          </a:p>
+          <a:p>
+            <a:r>
+              <a:t>FACTUAL BOUNDARY: the QBR sentence is a generic worked example. There is no client, employer, number or result behind it. Do not caption it as a case study, do not add a logo, do not imply it is real.</a:t>
+            </a:r>
+          </a:p>
+          <a:p>
+            <a:r>
+              <a:t>“It is a diagnostic” — not CV advice. Keep that framing.</a:t>
+            </a:r>
+          </a:p>
+          <a:p>
+            <a:r>
+              <a:t>Reveal states: 2. Reveal frame 4–5 in the build deck.</a:t>
             </a:r>
           </a:p>
         </p:txBody>
@@ -1214,12 +1304,27 @@
           <a:lstStyle/>
           <a:p>
             <a:r>
-              <a:t>Timing: approximately 4:16, holding to about 4:22.</a:t>
-            </a:r>
-          </a:p>
-          <a:p>
-            <a:r>
-              <a:t>Section card. Hold briefly, then back to presenter.</a:t>
+              <a:t>Timing: approximately 4:10.</a:t>
+            </a:r>
+          </a:p>
+          <a:p>
+            <a:r>
+              <a:t>Slide 5 — 02 Find Outside-Context Evidence.</a:t>
+            </a:r>
+          </a:p>
+          <a:p>
+            <a:r>
+              <a:t>Cue — the line that lands on this slide: “The second test is to find outside-context evidence.”</a:t>
+            </a:r>
+          </a:p>
+          <a:p>
+            <a:r>
+              <a:t>Section break only.</a:t>
+            </a:r>
+          </a:p>
+          <a:p>
+            <a:r>
+              <a:t>Single state. Reveal frame 6 in the build deck.</a:t>
             </a:r>
           </a:p>
         </p:txBody>
@@ -1289,27 +1394,37 @@
           <a:lstStyle/>
           <a:p>
             <a:r>
-              <a:t>Timing: approximately 4:22.</a:t>
-            </a:r>
-          </a:p>
-          <a:p>
-            <a:r>
-              <a:t>Reveal the evidence types one at a time.</a:t>
-            </a:r>
-          </a:p>
-          <a:p>
-            <a:r>
-              <a:t>This test is explicitly not about visibility or popularity. No job offer, no audience, no public profile required. Say that plainly.</a:t>
-            </a:r>
-          </a:p>
-          <a:p>
-            <a:r>
-              <a:t>The indispensable trap is named at the viewer and stays even-handed: depending on you raises how much they need you; it does not automatically make you easier for anyone else to understand. Two different kinds of value.</a:t>
-            </a:r>
-          </a:p>
-          <a:p>
-            <a:r>
-              <a:t>Close on the permission line: if nothing comes to mind yet, that is not a verdict — it is something untested.</a:t>
+              <a:t>Timing: approximately 4:13.</a:t>
+            </a:r>
+          </a:p>
+          <a:p>
+            <a:r>
+              <a:t>Slide 6 — Test Two.</a:t>
+            </a:r>
+          </a:p>
+          <a:p>
+            <a:r>
+              <a:t>Cue — the line that lands on this slide: “Think of a time your judgment was useful beyond your immediate role, your immediate team, or your employer.”</a:t>
+            </a:r>
+          </a:p>
+          <a:p>
+            <a:r>
+              <a:t>The examples of outside-context evidence reveal one at a time.</a:t>
+            </a:r>
+          </a:p>
+          <a:p>
+            <a:r>
+              <a:t>“It is the only evidence that has already been tested on people who did not owe you the benefit of the doubt.” That is the reason the test exists. Do not cut it.</a:t>
+            </a:r>
+          </a:p>
+          <a:p>
+            <a:r>
+              <a:t>The paragraph about deep versus wide is the non-alarmist safeguard in this section. Finding little outside-context evidence is not a verdict on the viewer. Keep both sentences.</a:t>
+            </a:r>
+          </a:p>
+          <a:p>
+            <a:r>
+              <a:t>Reveal states: 4. Reveal frame 7–10 in the build deck.</a:t>
             </a:r>
           </a:p>
         </p:txBody>
@@ -1379,12 +1494,27 @@
           <a:lstStyle/>
           <a:p>
             <a:r>
-              <a:t>Timing: approximately 5:56, holding to about 6:00.</a:t>
-            </a:r>
-          </a:p>
-          <a:p>
-            <a:r>
-              <a:t>Section card. Hold briefly, then back to presenter.</a:t>
+              <a:t>Timing: approximately 5:35.</a:t>
+            </a:r>
+          </a:p>
+          <a:p>
+            <a:r>
+              <a:t>Slide 7 — 03 Read the Last 90 Days.</a:t>
+            </a:r>
+          </a:p>
+          <a:p>
+            <a:r>
+              <a:t>Cue — the line that lands on this slide: “The third test is to read your last 90 days.”</a:t>
+            </a:r>
+          </a:p>
+          <a:p>
+            <a:r>
+              <a:t>Section break only.</a:t>
+            </a:r>
+          </a:p>
+          <a:p>
+            <a:r>
+              <a:t>Single state. Reveal frame 11 in the build deck.</a:t>
             </a:r>
           </a:p>
         </p:txBody>
@@ -1454,17 +1584,37 @@
           <a:lstStyle/>
           <a:p>
             <a:r>
-              <a:t>Timing: approximately 6:00.</a:t>
-            </a:r>
-          </a:p>
-          <a:p>
-            <a:r>
-              <a:t>Reveal the three questions, then the new-judgment versus same-work-faster contrast.</a:t>
-            </a:r>
-          </a:p>
-          <a:p>
-            <a:r>
-              <a:t>Speed is not dismissed. The line to protect is "You can get much better at work you already know how to do. That is real, and it is not the same thing as your range getting bigger." Both are allowed to be fine.</a:t>
+              <a:t>Timing: approximately 5:39.</a:t>
+            </a:r>
+          </a:p>
+          <a:p>
+            <a:r>
+              <a:t>Slide 8 — Test Three.</a:t>
+            </a:r>
+          </a:p>
+          <a:p>
+            <a:r>
+              <a:t>Cue — the line that lands on this slide: “Not whether you were busy.”</a:t>
+            </a:r>
+          </a:p>
+          <a:p>
+            <a:r>
+              <a:t>The questions reveal one at a time.</a:t>
+            </a:r>
+          </a:p>
+          <a:p>
+            <a:r>
+              <a:t>The skipped question — new judgment, or the same work faster — is the payoff of the section. Give it room before the answer.</a:t>
+            </a:r>
+          </a:p>
+          <a:p>
+            <a:r>
+              <a:t>“Both are fine. You just want to know which one you have been doing.” No judgement in the delivery, and no visual that codes speed as bad.</a:t>
+            </a:r>
+          </a:p>
+          <a:p>
+            <a:r>
+              <a:t>Reveal states: 4. Reveal frame 12–15 in the build deck.</a:t>
             </a:r>
           </a:p>
         </p:txBody>
@@ -1534,17 +1684,27 @@
           <a:lstStyle/>
           <a:p>
             <a:r>
-              <a:t>Timing: approximately 7:07.</a:t>
-            </a:r>
-          </a:p>
-          <a:p>
-            <a:r>
-              <a:t>The consolidation card. Reveal the three tests in order.</a:t>
-            </a:r>
-          </a:p>
-          <a:p>
-            <a:r>
-              <a:t>Do not add a fourth item, an acronym or a slogan. The three tests are the only memory device in this video.</a:t>
+              <a:t>Timing: approximately 6:36.</a:t>
+            </a:r>
+          </a:p>
+          <a:p>
+            <a:r>
+              <a:t>Slide 9 — The Three Tests.</a:t>
+            </a:r>
+          </a:p>
+          <a:p>
+            <a:r>
+              <a:t>Cue — the line that lands on this slide: “So those are the three.”</a:t>
+            </a:r>
+          </a:p>
+          <a:p>
+            <a:r>
+              <a:t>The three tests together on screen for the first time. Short slide.</a:t>
+            </a:r>
+          </a:p>
+          <a:p>
+            <a:r>
+              <a:t>Single state. Reveal frame 16 in the build deck.</a:t>
             </a:r>
           </a:p>
         </p:txBody>

--- a/deliverables/video-2-slides/out/Video-2-Is-Your-Job-Making-You-Less-Marketable_v1.1.pptx
+++ b/deliverables/video-2-slides/out/Video-2-Is-Your-Job-Making-You-Less-Marketable_v1.1.pptx
@@ -614,7 +614,7 @@
           <a:lstStyle/>
           <a:p>
             <a:r>
-              <a:t>Timing: approximately 6:43.</a:t>
+              <a:t>Timing: approximately 6:44.</a:t>
             </a:r>
           </a:p>
           <a:p>
@@ -714,7 +714,7 @@
           <a:lstStyle/>
           <a:p>
             <a:r>
-              <a:t>Timing: approximately 7:29.</a:t>
+              <a:t>Timing: approximately 7:31.</a:t>
             </a:r>
           </a:p>
           <a:p>
@@ -814,7 +814,7 @@
           <a:lstStyle/>
           <a:p>
             <a:r>
-              <a:t>Timing: approximately 8:46.</a:t>
+              <a:t>Timing: approximately 8:48.</a:t>
             </a:r>
           </a:p>
           <a:p>
@@ -909,7 +909,7 @@
           <a:lstStyle/>
           <a:p>
             <a:r>
-              <a:t>Timing: approximately 9:07.</a:t>
+              <a:t>Timing: approximately 9:09.</a:t>
             </a:r>
           </a:p>
           <a:p>
@@ -1029,7 +1029,7 @@
           </a:p>
           <a:p>
             <a:r>
-              <a:t>“Your company knows exactly why you matter. They watched you earn it.” is a compliment and must be delivered as one.</a:t>
+              <a:t>“The people around you may know exactly why you matter, because they have seen the work.” This is a compliment and must be delivered as one. The claim is deliberately bounded — it says the people around you MAY know, not that every company reads its people correctly.</a:t>
             </a:r>
           </a:p>
           <a:p>
@@ -1114,7 +1114,7 @@
           <a:lstStyle/>
           <a:p>
             <a:r>
-              <a:t>Timing: approximately 2:52.</a:t>
+              <a:t>Timing: approximately 2:54.</a:t>
             </a:r>
           </a:p>
           <a:p>
@@ -1204,7 +1204,7 @@
           <a:lstStyle/>
           <a:p>
             <a:r>
-              <a:t>Timing: approximately 2:56.</a:t>
+              <a:t>Timing: approximately 2:57.</a:t>
             </a:r>
           </a:p>
           <a:p>
@@ -1304,7 +1304,7 @@
           <a:lstStyle/>
           <a:p>
             <a:r>
-              <a:t>Timing: approximately 4:10.</a:t>
+              <a:t>Timing: approximately 4:12.</a:t>
             </a:r>
           </a:p>
           <a:p>
@@ -1394,7 +1394,7 @@
           <a:lstStyle/>
           <a:p>
             <a:r>
-              <a:t>Timing: approximately 4:13.</a:t>
+              <a:t>Timing: approximately 4:15.</a:t>
             </a:r>
           </a:p>
           <a:p>
@@ -1494,7 +1494,7 @@
           <a:lstStyle/>
           <a:p>
             <a:r>
-              <a:t>Timing: approximately 5:35.</a:t>
+              <a:t>Timing: approximately 5:36.</a:t>
             </a:r>
           </a:p>
           <a:p>
@@ -1584,7 +1584,7 @@
           <a:lstStyle/>
           <a:p>
             <a:r>
-              <a:t>Timing: approximately 5:39.</a:t>
+              <a:t>Timing: approximately 5:40.</a:t>
             </a:r>
           </a:p>
           <a:p>
@@ -1684,7 +1684,7 @@
           <a:lstStyle/>
           <a:p>
             <a:r>
-              <a:t>Timing: approximately 6:36.</a:t>
+              <a:t>Timing: approximately 6:37.</a:t>
             </a:r>
           </a:p>
           <a:p>

--- a/deliverables/video-2-slides/out/Video-2-Is-Your-Job-Making-You-Less-Marketable_v1.1.pptx
+++ b/deliverables/video-2-slides/out/Video-2-Is-Your-Job-Making-You-Less-Marketable_v1.1.pptx
@@ -1219,7 +1219,7 @@
           </a:p>
           <a:p>
             <a:r>
-              <a:t>The before and after sentence is the centre of this slide. Reveal the before, let it sit, then the after.</a:t>
+              <a:t>The before and after sentence is the center of this slide. Reveal the before, let it sit, then the after.</a:t>
             </a:r>
           </a:p>
           <a:p>
